--- a/docs/sales-reform-toolkit/meetings/点検会議_キーチャートテンプレート.pptx
+++ b/docs/sales-reform-toolkit/meetings/点検会議_キーチャートテンプレート.pptx
@@ -4639,7 +4639,7 @@
         </p:nvGraphicFramePr>
         <p:xfrm>
           <a:off x="502920" y="1901952"/>
-          <a:ext cx="11183109" cy="2926080"/>
+          <a:ext cx="11183109" cy="2633472"/>
         </p:xfrm>
         <a:graphic>
           <a:graphicData uri="http://schemas.openxmlformats.org/drawingml/2006/table">
@@ -4654,7 +4654,7 @@
                 <a:gridCol w="2199956"/>
                 <a:gridCol w="2199956"/>
               </a:tblGrid>
-              <a:tr h="731520">
+              <a:tr h="658368">
                 <a:tc>
                   <a:txBody>
                     <a:bodyPr wrap="square"/>
@@ -4801,7 +4801,7 @@
                   </a:tcPr>
                 </a:tc>
               </a:tr>
-              <a:tr h="731520">
+              <a:tr h="658368">
                 <a:tc>
                   <a:txBody>
                     <a:bodyPr wrap="square"/>
@@ -4948,7 +4948,7 @@
                   </a:tcPr>
                 </a:tc>
               </a:tr>
-              <a:tr h="731520">
+              <a:tr h="658368">
                 <a:tc>
                   <a:txBody>
                     <a:bodyPr wrap="square"/>
@@ -5095,7 +5095,7 @@
                   </a:tcPr>
                 </a:tc>
               </a:tr>
-              <a:tr h="731520">
+              <a:tr h="658368">
                 <a:tc>
                   <a:txBody>
                     <a:bodyPr wrap="square"/>
@@ -5254,7 +5254,7 @@
         </p:nvSpPr>
         <p:spPr>
           <a:xfrm>
-            <a:off x="502920" y="4480560"/>
+            <a:off x="502920" y="4709160"/>
             <a:ext cx="11155680" cy="1280160"/>
           </a:xfrm>
           <a:prstGeom prst="rect">
@@ -5603,7 +5603,7 @@
         </p:nvGraphicFramePr>
         <p:xfrm>
           <a:off x="502920" y="1737360"/>
-          <a:ext cx="11183110" cy="4206240"/>
+          <a:ext cx="11183110" cy="3657600"/>
         </p:xfrm>
         <a:graphic>
           <a:graphicData uri="http://schemas.openxmlformats.org/drawingml/2006/table">
@@ -5617,7 +5617,7 @@
                 <a:gridCol w="3116604"/>
                 <a:gridCol w="3024940"/>
               </a:tblGrid>
-              <a:tr h="1051560">
+              <a:tr h="914400">
                 <a:tc>
                   <a:txBody>
                     <a:bodyPr wrap="square"/>
@@ -5735,7 +5735,7 @@
                   </a:tcPr>
                 </a:tc>
               </a:tr>
-              <a:tr h="1051560">
+              <a:tr h="914400">
                 <a:tc>
                   <a:txBody>
                     <a:bodyPr wrap="square"/>
@@ -5853,7 +5853,7 @@
                   </a:tcPr>
                 </a:tc>
               </a:tr>
-              <a:tr h="1051560">
+              <a:tr h="914400">
                 <a:tc>
                   <a:txBody>
                     <a:bodyPr wrap="square"/>
@@ -5971,7 +5971,7 @@
                   </a:tcPr>
                 </a:tc>
               </a:tr>
-              <a:tr h="1051560">
+              <a:tr h="914400">
                 <a:tc>
                   <a:txBody>
                     <a:bodyPr wrap="square"/>
@@ -6101,7 +6101,7 @@
         </p:nvSpPr>
         <p:spPr>
           <a:xfrm>
-            <a:off x="502920" y="5394960"/>
+            <a:off x="502920" y="5623560"/>
             <a:ext cx="11155680" cy="457200"/>
           </a:xfrm>
           <a:prstGeom prst="rect">
@@ -8447,7 +8447,7 @@
         </p:nvSpPr>
         <p:spPr>
           <a:xfrm>
-            <a:off x="502920" y="4434840"/>
+            <a:off x="502920" y="4754880"/>
             <a:ext cx="11155680" cy="1188720"/>
           </a:xfrm>
           <a:prstGeom prst="rect">
